--- a/docs/aau.cnap.lnp.cogniPain2.protocol.v1/StroopInstructions_DE.pptx
+++ b/docs/aau.cnap.lnp.cogniPain2.protocol.v1/StroopInstructions_DE.pptx
@@ -200,7 +200,7 @@
           <a:p>
             <a:fld id="{9C9C5307-3CE3-407E-9D60-908EEB969D0F}" type="datetimeFigureOut">
               <a:rPr lang="en-DK" smtClean="0"/>
-              <a:t>08/11/2024</a:t>
+              <a:t>26/06/2026</a:t>
             </a:fld>
             <a:endParaRPr lang="en-DK"/>
           </a:p>
@@ -1338,8 +1338,8 @@
           <a:p>
             <a:pPr algn="ctr"/>
             <a:r>
-              <a:rPr lang="en-GB" sz="2400" dirty="0"/>
-              <a:t>You will see a series of circles in red, green, blue or yellow. Press the button that correspond to the colour of the circle.</a:t>
+              <a:rPr lang="de-DE" sz="2400" dirty="0"/>
+              <a:t>Sie sehen eine Reihe von Kreisen in Rot, Grün, Blau oder Gelb. Drücken Sie den Knopf, der der Farbe des Kreises entspricht.</a:t>
             </a:r>
             <a:endParaRPr lang="en-DK" sz="2400" dirty="0"/>
           </a:p>
@@ -1745,8 +1745,8 @@
           <a:lstStyle/>
           <a:p>
             <a:r>
-              <a:rPr lang="en-GB" dirty="0"/>
-              <a:t>In this case press the RED button, because the circle is red.</a:t>
+              <a:rPr lang="de-DE" dirty="0"/>
+              <a:t>Drücken Sie in diesem Fall den ROTEN Knopf, da der Kreis rot ist.</a:t>
             </a:r>
             <a:endParaRPr lang="en-DK" dirty="0"/>
           </a:p>
@@ -2017,8 +2017,8 @@
           <a:p>
             <a:pPr algn="ctr"/>
             <a:r>
-              <a:rPr lang="en-GB" sz="2400" dirty="0"/>
-              <a:t>You will see a series of words written in red, green, blue or yellow. Press the button that correspond to the colour the word is written in.</a:t>
+              <a:rPr lang="de-DE" sz="2400" dirty="0"/>
+              <a:t>Sie sehen eine Reihe von Wörtern in Rot, Grün, Blau oder Gelb. Drücken Sie die Taste, die der Farbe des Wortes entspricht.</a:t>
             </a:r>
             <a:endParaRPr lang="en-DK" sz="2400" dirty="0"/>
           </a:p>
@@ -2058,7 +2058,7 @@
                   <a:srgbClr val="FF0000"/>
                 </a:solidFill>
               </a:rPr>
-              <a:t>GREEN</a:t>
+              <a:t>ZWEIG</a:t>
             </a:r>
             <a:endParaRPr lang="en-DK" sz="4000" dirty="0">
               <a:solidFill>
@@ -2363,8 +2363,8 @@
           <a:lstStyle/>
           <a:p>
             <a:r>
-              <a:rPr lang="en-GB" dirty="0"/>
-              <a:t>In this case press the RED button, because the word is written in red.</a:t>
+              <a:rPr lang="de-DE" dirty="0"/>
+              <a:t>Drücken Sie in diesem Fall den ROTEN Knopf, da das Wort rot geschrieben ist.</a:t>
             </a:r>
             <a:endParaRPr lang="en-DK" dirty="0"/>
           </a:p>
@@ -2446,43 +2446,6 @@
           <a:chExt cx="0" cy="0"/>
         </a:xfrm>
       </p:grpSpPr>
-      <p:sp>
-        <p:nvSpPr>
-          <p:cNvPr id="7" name="TextBox 6">
-            <a:extLst>
-              <a:ext uri="{FF2B5EF4-FFF2-40B4-BE49-F238E27FC236}">
-                <a16:creationId xmlns:a16="http://schemas.microsoft.com/office/drawing/2014/main" id="{72272CE1-E739-FDA7-3DE8-0908A2ED6630}"/>
-              </a:ext>
-            </a:extLst>
-          </p:cNvPr>
-          <p:cNvSpPr txBox="1"/>
-          <p:nvPr/>
-        </p:nvSpPr>
-        <p:spPr>
-          <a:xfrm>
-            <a:off x="1660338" y="563427"/>
-            <a:ext cx="9322189" cy="830997"/>
-          </a:xfrm>
-          <a:prstGeom prst="rect">
-            <a:avLst/>
-          </a:prstGeom>
-          <a:noFill/>
-        </p:spPr>
-        <p:txBody>
-          <a:bodyPr wrap="square" rtlCol="0">
-            <a:spAutoFit/>
-          </a:bodyPr>
-          <a:lstStyle/>
-          <a:p>
-            <a:pPr algn="ctr"/>
-            <a:r>
-              <a:rPr lang="en-GB" sz="2400" dirty="0"/>
-              <a:t>You will see a series of circles in red, green, blue or yellow. Press the button that correspond to the colour of the circle.</a:t>
-            </a:r>
-            <a:endParaRPr lang="en-DK" sz="2400" dirty="0"/>
-          </a:p>
-        </p:txBody>
-      </p:sp>
       <p:sp>
         <p:nvSpPr>
           <p:cNvPr id="2" name="Oval 1">
@@ -2854,42 +2817,6 @@
           </a:p>
         </p:txBody>
       </p:sp>
-      <p:sp>
-        <p:nvSpPr>
-          <p:cNvPr id="12" name="TextBox 11">
-            <a:extLst>
-              <a:ext uri="{FF2B5EF4-FFF2-40B4-BE49-F238E27FC236}">
-                <a16:creationId xmlns:a16="http://schemas.microsoft.com/office/drawing/2014/main" id="{0F866BCD-13EE-9EF1-3D07-14EEDEC94D7B}"/>
-              </a:ext>
-            </a:extLst>
-          </p:cNvPr>
-          <p:cNvSpPr txBox="1"/>
-          <p:nvPr/>
-        </p:nvSpPr>
-        <p:spPr>
-          <a:xfrm>
-            <a:off x="6895484" y="1853006"/>
-            <a:ext cx="4170157" cy="646331"/>
-          </a:xfrm>
-          <a:prstGeom prst="rect">
-            <a:avLst/>
-          </a:prstGeom>
-          <a:noFill/>
-        </p:spPr>
-        <p:txBody>
-          <a:bodyPr wrap="square" rtlCol="0">
-            <a:spAutoFit/>
-          </a:bodyPr>
-          <a:lstStyle/>
-          <a:p>
-            <a:r>
-              <a:rPr lang="en-GB" dirty="0"/>
-              <a:t>In this case press the RED button, because the circle is red.</a:t>
-            </a:r>
-            <a:endParaRPr lang="en-DK" dirty="0"/>
-          </a:p>
-        </p:txBody>
-      </p:sp>
       <p:cxnSp>
         <p:nvCxnSpPr>
           <p:cNvPr id="14" name="Straight Arrow Connector 13">
@@ -2900,7 +2827,7 @@
             </a:extLst>
           </p:cNvPr>
           <p:cNvCxnSpPr>
-            <a:stCxn id="12" idx="2"/>
+            <a:cxnSpLocks/>
             <a:endCxn id="3" idx="0"/>
           </p:cNvCxnSpPr>
           <p:nvPr/>
@@ -2986,6 +2913,79 @@
           <a:p>
             <a:pPr algn="ctr"/>
             <a:endParaRPr lang="en-DK"/>
+          </a:p>
+        </p:txBody>
+      </p:sp>
+      <p:sp>
+        <p:nvSpPr>
+          <p:cNvPr id="4" name="TextBox 3">
+            <a:extLst>
+              <a:ext uri="{FF2B5EF4-FFF2-40B4-BE49-F238E27FC236}">
+                <a16:creationId xmlns:a16="http://schemas.microsoft.com/office/drawing/2014/main" id="{3317940C-F1C6-9FD8-D55F-0F1DB6C709B4}"/>
+              </a:ext>
+            </a:extLst>
+          </p:cNvPr>
+          <p:cNvSpPr txBox="1"/>
+          <p:nvPr/>
+        </p:nvSpPr>
+        <p:spPr>
+          <a:xfrm>
+            <a:off x="1660338" y="563427"/>
+            <a:ext cx="9322189" cy="830997"/>
+          </a:xfrm>
+          <a:prstGeom prst="rect">
+            <a:avLst/>
+          </a:prstGeom>
+          <a:noFill/>
+        </p:spPr>
+        <p:txBody>
+          <a:bodyPr wrap="square" rtlCol="0">
+            <a:spAutoFit/>
+          </a:bodyPr>
+          <a:lstStyle/>
+          <a:p>
+            <a:pPr algn="ctr"/>
+            <a:r>
+              <a:rPr lang="de-DE" sz="2400" dirty="0"/>
+              <a:t>Sie sehen eine Reihe von Kreisen in Rot, Grün, Blau oder Gelb. Drücken Sie den Knopf, der der Farbe des Kreises entspricht.</a:t>
+            </a:r>
+            <a:endParaRPr lang="en-DK" sz="2400" dirty="0"/>
+          </a:p>
+        </p:txBody>
+      </p:sp>
+      <p:sp>
+        <p:nvSpPr>
+          <p:cNvPr id="13" name="TextBox 12">
+            <a:extLst>
+              <a:ext uri="{FF2B5EF4-FFF2-40B4-BE49-F238E27FC236}">
+                <a16:creationId xmlns:a16="http://schemas.microsoft.com/office/drawing/2014/main" id="{90DF1079-EC70-F3BE-D780-32A32C70EB79}"/>
+              </a:ext>
+            </a:extLst>
+          </p:cNvPr>
+          <p:cNvSpPr txBox="1"/>
+          <p:nvPr/>
+        </p:nvSpPr>
+        <p:spPr>
+          <a:xfrm>
+            <a:off x="7014752" y="1853006"/>
+            <a:ext cx="4170157" cy="646331"/>
+          </a:xfrm>
+          <a:prstGeom prst="rect">
+            <a:avLst/>
+          </a:prstGeom>
+          <a:noFill/>
+        </p:spPr>
+        <p:txBody>
+          <a:bodyPr wrap="square" rtlCol="0">
+            <a:spAutoFit/>
+          </a:bodyPr>
+          <a:lstStyle/>
+          <a:p>
+            <a:r>
+              <a:rPr lang="de-DE" dirty="0"/>
+              <a:t>Drücken Sie in diesem Fall den ROTEN Knopf, da der Kreis rot ist.</a:t>
+            </a:r>
+            <a:endParaRPr lang="en-DK" dirty="0"/>
           </a:p>
         </p:txBody>
       </p:sp>
@@ -3337,42 +3337,6 @@
           </a:p>
         </p:txBody>
       </p:sp>
-      <p:sp>
-        <p:nvSpPr>
-          <p:cNvPr id="12" name="TextBox 11">
-            <a:extLst>
-              <a:ext uri="{FF2B5EF4-FFF2-40B4-BE49-F238E27FC236}">
-                <a16:creationId xmlns:a16="http://schemas.microsoft.com/office/drawing/2014/main" id="{0F866BCD-13EE-9EF1-3D07-14EEDEC94D7B}"/>
-              </a:ext>
-            </a:extLst>
-          </p:cNvPr>
-          <p:cNvSpPr txBox="1"/>
-          <p:nvPr/>
-        </p:nvSpPr>
-        <p:spPr>
-          <a:xfrm>
-            <a:off x="6895484" y="1853006"/>
-            <a:ext cx="4170157" cy="646331"/>
-          </a:xfrm>
-          <a:prstGeom prst="rect">
-            <a:avLst/>
-          </a:prstGeom>
-          <a:noFill/>
-        </p:spPr>
-        <p:txBody>
-          <a:bodyPr wrap="square" rtlCol="0">
-            <a:spAutoFit/>
-          </a:bodyPr>
-          <a:lstStyle/>
-          <a:p>
-            <a:r>
-              <a:rPr lang="en-GB" dirty="0"/>
-              <a:t>In this case press the RED button, because the word is written in red.</a:t>
-            </a:r>
-            <a:endParaRPr lang="en-DK" dirty="0"/>
-          </a:p>
-        </p:txBody>
-      </p:sp>
       <p:cxnSp>
         <p:nvCxnSpPr>
           <p:cNvPr id="14" name="Straight Arrow Connector 13">
@@ -3383,7 +3347,7 @@
             </a:extLst>
           </p:cNvPr>
           <p:cNvCxnSpPr>
-            <a:stCxn id="12" idx="2"/>
+            <a:cxnSpLocks/>
             <a:endCxn id="3" idx="0"/>
           </p:cNvCxnSpPr>
           <p:nvPr/>
@@ -3474,10 +3438,10 @@
       </p:sp>
       <p:sp>
         <p:nvSpPr>
-          <p:cNvPr id="4" name="TextBox 3">
+          <p:cNvPr id="2" name="TextBox 1">
             <a:extLst>
               <a:ext uri="{FF2B5EF4-FFF2-40B4-BE49-F238E27FC236}">
-                <a16:creationId xmlns:a16="http://schemas.microsoft.com/office/drawing/2014/main" id="{9BC7286E-540A-E2B3-D8AD-727E82267F80}"/>
+                <a16:creationId xmlns:a16="http://schemas.microsoft.com/office/drawing/2014/main" id="{882864DC-38C7-FB6C-B0CE-DA8236994E48}"/>
               </a:ext>
             </a:extLst>
           </p:cNvPr>
@@ -3502,8 +3466,8 @@
           <a:p>
             <a:pPr algn="ctr"/>
             <a:r>
-              <a:rPr lang="en-GB" sz="2400" dirty="0"/>
-              <a:t>You will see a series of words written in red, green, blue or yellow. Press the button that correspond to the colour the word is written in.</a:t>
+              <a:rPr lang="de-DE" sz="2400" dirty="0"/>
+              <a:t>Sie sehen eine Reihe von Wörtern in Rot, Grün, Blau oder Gelb. Drücken Sie die Taste, die der Farbe des Wortes entspricht.</a:t>
             </a:r>
             <a:endParaRPr lang="en-DK" sz="2400" dirty="0"/>
           </a:p>
@@ -3511,10 +3475,10 @@
       </p:sp>
       <p:sp>
         <p:nvSpPr>
-          <p:cNvPr id="13" name="TextBox 12">
+          <p:cNvPr id="7" name="TextBox 6">
             <a:extLst>
               <a:ext uri="{FF2B5EF4-FFF2-40B4-BE49-F238E27FC236}">
-                <a16:creationId xmlns:a16="http://schemas.microsoft.com/office/drawing/2014/main" id="{38969B68-7DE4-4BA1-511B-75BBBF64D129}"/>
+                <a16:creationId xmlns:a16="http://schemas.microsoft.com/office/drawing/2014/main" id="{4D629582-8916-89C9-F02D-81DFC75850AB}"/>
               </a:ext>
             </a:extLst>
           </p:cNvPr>
@@ -3543,13 +3507,49 @@
                   <a:srgbClr val="FF0000"/>
                 </a:solidFill>
               </a:rPr>
-              <a:t>GREEN</a:t>
+              <a:t>ZWEIG</a:t>
             </a:r>
             <a:endParaRPr lang="en-DK" sz="4000" dirty="0">
               <a:solidFill>
                 <a:srgbClr val="FF0000"/>
               </a:solidFill>
             </a:endParaRPr>
+          </a:p>
+        </p:txBody>
+      </p:sp>
+      <p:sp>
+        <p:nvSpPr>
+          <p:cNvPr id="16" name="TextBox 15">
+            <a:extLst>
+              <a:ext uri="{FF2B5EF4-FFF2-40B4-BE49-F238E27FC236}">
+                <a16:creationId xmlns:a16="http://schemas.microsoft.com/office/drawing/2014/main" id="{BD6D0810-9F40-00A5-41FA-1C20E23D5CE0}"/>
+              </a:ext>
+            </a:extLst>
+          </p:cNvPr>
+          <p:cNvSpPr txBox="1"/>
+          <p:nvPr/>
+        </p:nvSpPr>
+        <p:spPr>
+          <a:xfrm>
+            <a:off x="7001500" y="1786616"/>
+            <a:ext cx="4170157" cy="646331"/>
+          </a:xfrm>
+          <a:prstGeom prst="rect">
+            <a:avLst/>
+          </a:prstGeom>
+          <a:noFill/>
+        </p:spPr>
+        <p:txBody>
+          <a:bodyPr wrap="square" rtlCol="0">
+            <a:spAutoFit/>
+          </a:bodyPr>
+          <a:lstStyle/>
+          <a:p>
+            <a:r>
+              <a:rPr lang="de-DE" dirty="0"/>
+              <a:t>Drücken Sie in diesem Fall den ROTEN Knopf, da das Wort rot geschrieben ist.</a:t>
+            </a:r>
+            <a:endParaRPr lang="en-DK" dirty="0"/>
           </a:p>
         </p:txBody>
       </p:sp>
